--- a/assets/MergeWorkflow.pptx
+++ b/assets/MergeWorkflow.pptx
@@ -104,6 +104,11 @@
       </a:defRPr>
     </a:lvl9pPr>
   </p:defaultTextStyle>
+  <p:extLst>
+    <p:ext uri="{EFAFB233-063F-42B5-8137-9DF3F51BA10A}">
+      <p15:sldGuideLst xmlns:p15="http://schemas.microsoft.com/office/powerpoint/2012/main"/>
+    </p:ext>
+  </p:extLst>
 </p:presentation>
 </file>
 
@@ -238,7 +243,7 @@
           <a:p>
             <a:fld id="{679B0B16-9E19-4E02-99D6-12EA1E42193C}" type="datetimeFigureOut">
               <a:rPr lang="en-GB" smtClean="0"/>
-              <a:t>18/09/2024</a:t>
+              <a:t>26/09/2024</a:t>
             </a:fld>
             <a:endParaRPr lang="en-GB"/>
           </a:p>
@@ -408,7 +413,7 @@
           <a:p>
             <a:fld id="{679B0B16-9E19-4E02-99D6-12EA1E42193C}" type="datetimeFigureOut">
               <a:rPr lang="en-GB" smtClean="0"/>
-              <a:t>18/09/2024</a:t>
+              <a:t>26/09/2024</a:t>
             </a:fld>
             <a:endParaRPr lang="en-GB"/>
           </a:p>
@@ -588,7 +593,7 @@
           <a:p>
             <a:fld id="{679B0B16-9E19-4E02-99D6-12EA1E42193C}" type="datetimeFigureOut">
               <a:rPr lang="en-GB" smtClean="0"/>
-              <a:t>18/09/2024</a:t>
+              <a:t>26/09/2024</a:t>
             </a:fld>
             <a:endParaRPr lang="en-GB"/>
           </a:p>
@@ -758,7 +763,7 @@
           <a:p>
             <a:fld id="{679B0B16-9E19-4E02-99D6-12EA1E42193C}" type="datetimeFigureOut">
               <a:rPr lang="en-GB" smtClean="0"/>
-              <a:t>18/09/2024</a:t>
+              <a:t>26/09/2024</a:t>
             </a:fld>
             <a:endParaRPr lang="en-GB"/>
           </a:p>
@@ -1004,7 +1009,7 @@
           <a:p>
             <a:fld id="{679B0B16-9E19-4E02-99D6-12EA1E42193C}" type="datetimeFigureOut">
               <a:rPr lang="en-GB" smtClean="0"/>
-              <a:t>18/09/2024</a:t>
+              <a:t>26/09/2024</a:t>
             </a:fld>
             <a:endParaRPr lang="en-GB"/>
           </a:p>
@@ -1236,7 +1241,7 @@
           <a:p>
             <a:fld id="{679B0B16-9E19-4E02-99D6-12EA1E42193C}" type="datetimeFigureOut">
               <a:rPr lang="en-GB" smtClean="0"/>
-              <a:t>18/09/2024</a:t>
+              <a:t>26/09/2024</a:t>
             </a:fld>
             <a:endParaRPr lang="en-GB"/>
           </a:p>
@@ -1603,7 +1608,7 @@
           <a:p>
             <a:fld id="{679B0B16-9E19-4E02-99D6-12EA1E42193C}" type="datetimeFigureOut">
               <a:rPr lang="en-GB" smtClean="0"/>
-              <a:t>18/09/2024</a:t>
+              <a:t>26/09/2024</a:t>
             </a:fld>
             <a:endParaRPr lang="en-GB"/>
           </a:p>
@@ -1721,7 +1726,7 @@
           <a:p>
             <a:fld id="{679B0B16-9E19-4E02-99D6-12EA1E42193C}" type="datetimeFigureOut">
               <a:rPr lang="en-GB" smtClean="0"/>
-              <a:t>18/09/2024</a:t>
+              <a:t>26/09/2024</a:t>
             </a:fld>
             <a:endParaRPr lang="en-GB"/>
           </a:p>
@@ -1816,7 +1821,7 @@
           <a:p>
             <a:fld id="{679B0B16-9E19-4E02-99D6-12EA1E42193C}" type="datetimeFigureOut">
               <a:rPr lang="en-GB" smtClean="0"/>
-              <a:t>18/09/2024</a:t>
+              <a:t>26/09/2024</a:t>
             </a:fld>
             <a:endParaRPr lang="en-GB"/>
           </a:p>
@@ -2093,7 +2098,7 @@
           <a:p>
             <a:fld id="{679B0B16-9E19-4E02-99D6-12EA1E42193C}" type="datetimeFigureOut">
               <a:rPr lang="en-GB" smtClean="0"/>
-              <a:t>18/09/2024</a:t>
+              <a:t>26/09/2024</a:t>
             </a:fld>
             <a:endParaRPr lang="en-GB"/>
           </a:p>
@@ -2350,7 +2355,7 @@
           <a:p>
             <a:fld id="{679B0B16-9E19-4E02-99D6-12EA1E42193C}" type="datetimeFigureOut">
               <a:rPr lang="en-GB" smtClean="0"/>
-              <a:t>18/09/2024</a:t>
+              <a:t>26/09/2024</a:t>
             </a:fld>
             <a:endParaRPr lang="en-GB"/>
           </a:p>
@@ -2563,7 +2568,7 @@
           <a:p>
             <a:fld id="{679B0B16-9E19-4E02-99D6-12EA1E42193C}" type="datetimeFigureOut">
               <a:rPr lang="en-GB" smtClean="0"/>
-              <a:t>18/09/2024</a:t>
+              <a:t>26/09/2024</a:t>
             </a:fld>
             <a:endParaRPr lang="en-GB"/>
           </a:p>
@@ -2968,937 +2973,1256 @@
           <a:chExt cx="0" cy="0"/>
         </a:xfrm>
       </p:grpSpPr>
-      <p:sp>
-        <p:nvSpPr>
-          <p:cNvPr id="65" name="Rectangle: Rounded Corners 64">
+      <p:grpSp>
+        <p:nvGrpSpPr>
+          <p:cNvPr id="22" name="Group 21">
             <a:extLst>
               <a:ext uri="{FF2B5EF4-FFF2-40B4-BE49-F238E27FC236}">
-                <a16:creationId xmlns:a16="http://schemas.microsoft.com/office/drawing/2014/main" id="{BDE42C5E-2555-A668-5257-172D65AD2706}"/>
+                <a16:creationId xmlns:a16="http://schemas.microsoft.com/office/drawing/2014/main" id="{282669A2-0109-FB4B-9D0C-85DD69D9A0FD}"/>
               </a:ext>
             </a:extLst>
           </p:cNvPr>
-          <p:cNvSpPr/>
+          <p:cNvGrpSpPr/>
           <p:nvPr/>
-        </p:nvSpPr>
-        <p:spPr>
+        </p:nvGrpSpPr>
+        <p:grpSpPr>
           <a:xfrm>
-            <a:off x="337076" y="3740476"/>
-            <a:ext cx="6242050" cy="2025324"/>
+            <a:off x="346710" y="624992"/>
+            <a:ext cx="6152820" cy="5054933"/>
+            <a:chOff x="346710" y="624992"/>
+            <a:chExt cx="6152820" cy="5054933"/>
           </a:xfrm>
-          <a:prstGeom prst="roundRect">
-            <a:avLst/>
-          </a:prstGeom>
-          <a:solidFill>
-            <a:schemeClr val="accent1">
-              <a:alpha val="30000"/>
-            </a:schemeClr>
-          </a:solidFill>
-        </p:spPr>
-        <p:style>
-          <a:lnRef idx="2">
-            <a:schemeClr val="accent1">
-              <a:shade val="15000"/>
-            </a:schemeClr>
-          </a:lnRef>
-          <a:fillRef idx="1">
-            <a:schemeClr val="accent1"/>
-          </a:fillRef>
-          <a:effectRef idx="0">
-            <a:schemeClr val="accent1"/>
-          </a:effectRef>
-          <a:fontRef idx="minor">
-            <a:schemeClr val="lt1"/>
-          </a:fontRef>
-        </p:style>
-        <p:txBody>
-          <a:bodyPr rtlCol="0" anchor="ctr"/>
-          <a:lstStyle/>
-          <a:p>
-            <a:pPr algn="ctr"/>
-            <a:endParaRPr lang="en-GB" dirty="0"/>
-          </a:p>
-        </p:txBody>
-      </p:sp>
-      <p:sp>
-        <p:nvSpPr>
-          <p:cNvPr id="57" name="Rectangle: Rounded Corners 56">
-            <a:extLst>
-              <a:ext uri="{FF2B5EF4-FFF2-40B4-BE49-F238E27FC236}">
-                <a16:creationId xmlns:a16="http://schemas.microsoft.com/office/drawing/2014/main" id="{0A37C06B-E657-1F5D-6517-D3CE31FDFF0E}"/>
-              </a:ext>
-            </a:extLst>
-          </p:cNvPr>
-          <p:cNvSpPr/>
-          <p:nvPr/>
-        </p:nvSpPr>
-        <p:spPr>
-          <a:xfrm>
-            <a:off x="337076" y="1680818"/>
-            <a:ext cx="6242050" cy="831328"/>
-          </a:xfrm>
-          <a:prstGeom prst="roundRect">
-            <a:avLst/>
-          </a:prstGeom>
-          <a:solidFill>
-            <a:schemeClr val="accent1">
-              <a:alpha val="30000"/>
-            </a:schemeClr>
-          </a:solidFill>
-        </p:spPr>
-        <p:style>
-          <a:lnRef idx="2">
-            <a:schemeClr val="accent1">
-              <a:shade val="15000"/>
-            </a:schemeClr>
-          </a:lnRef>
-          <a:fillRef idx="1">
-            <a:schemeClr val="accent1"/>
-          </a:fillRef>
-          <a:effectRef idx="0">
-            <a:schemeClr val="accent1"/>
-          </a:effectRef>
-          <a:fontRef idx="minor">
-            <a:schemeClr val="lt1"/>
-          </a:fontRef>
-        </p:style>
-        <p:txBody>
-          <a:bodyPr rtlCol="0" anchor="ctr"/>
-          <a:lstStyle/>
-          <a:p>
-            <a:pPr algn="ctr"/>
-            <a:endParaRPr lang="en-GB" dirty="0"/>
-          </a:p>
-        </p:txBody>
-      </p:sp>
-      <p:sp>
-        <p:nvSpPr>
-          <p:cNvPr id="58" name="Rectangle: Rounded Corners 57">
-            <a:extLst>
-              <a:ext uri="{FF2B5EF4-FFF2-40B4-BE49-F238E27FC236}">
-                <a16:creationId xmlns:a16="http://schemas.microsoft.com/office/drawing/2014/main" id="{7E947829-6503-7B98-E985-C491D876371A}"/>
-              </a:ext>
-            </a:extLst>
-          </p:cNvPr>
-          <p:cNvSpPr/>
-          <p:nvPr/>
-        </p:nvSpPr>
-        <p:spPr>
-          <a:xfrm>
-            <a:off x="361950" y="2692069"/>
-            <a:ext cx="6242050" cy="924007"/>
-          </a:xfrm>
-          <a:prstGeom prst="roundRect">
-            <a:avLst/>
-          </a:prstGeom>
-          <a:solidFill>
-            <a:schemeClr val="accent1">
-              <a:alpha val="30000"/>
-            </a:schemeClr>
-          </a:solidFill>
-        </p:spPr>
-        <p:style>
-          <a:lnRef idx="2">
-            <a:schemeClr val="accent1">
-              <a:shade val="15000"/>
-            </a:schemeClr>
-          </a:lnRef>
-          <a:fillRef idx="1">
-            <a:schemeClr val="accent1"/>
-          </a:fillRef>
-          <a:effectRef idx="0">
-            <a:schemeClr val="accent1"/>
-          </a:effectRef>
-          <a:fontRef idx="minor">
-            <a:schemeClr val="lt1"/>
-          </a:fontRef>
-        </p:style>
-        <p:txBody>
-          <a:bodyPr rtlCol="0" anchor="ctr"/>
-          <a:lstStyle/>
-          <a:p>
-            <a:pPr algn="ctr"/>
-            <a:endParaRPr lang="en-GB" dirty="0"/>
-          </a:p>
-        </p:txBody>
-      </p:sp>
-      <p:sp>
-        <p:nvSpPr>
-          <p:cNvPr id="54" name="Rectangle: Rounded Corners 53">
-            <a:extLst>
-              <a:ext uri="{FF2B5EF4-FFF2-40B4-BE49-F238E27FC236}">
-                <a16:creationId xmlns:a16="http://schemas.microsoft.com/office/drawing/2014/main" id="{6334BB8A-DA23-CFB5-4299-9DC5861702DB}"/>
-              </a:ext>
-            </a:extLst>
-          </p:cNvPr>
-          <p:cNvSpPr/>
-          <p:nvPr/>
-        </p:nvSpPr>
-        <p:spPr>
-          <a:xfrm>
-            <a:off x="361950" y="632612"/>
-            <a:ext cx="6242050" cy="841075"/>
-          </a:xfrm>
-          <a:prstGeom prst="roundRect">
-            <a:avLst/>
-          </a:prstGeom>
-          <a:solidFill>
-            <a:schemeClr val="accent1">
-              <a:alpha val="30000"/>
-            </a:schemeClr>
-          </a:solidFill>
-        </p:spPr>
-        <p:style>
-          <a:lnRef idx="2">
-            <a:schemeClr val="accent1">
-              <a:shade val="15000"/>
-            </a:schemeClr>
-          </a:lnRef>
-          <a:fillRef idx="1">
-            <a:schemeClr val="accent1"/>
-          </a:fillRef>
-          <a:effectRef idx="0">
-            <a:schemeClr val="accent1"/>
-          </a:effectRef>
-          <a:fontRef idx="minor">
-            <a:schemeClr val="lt1"/>
-          </a:fontRef>
-        </p:style>
-        <p:txBody>
-          <a:bodyPr rtlCol="0" anchor="ctr"/>
-          <a:lstStyle/>
-          <a:p>
-            <a:pPr algn="ctr"/>
-            <a:endParaRPr lang="en-GB" dirty="0"/>
-          </a:p>
-        </p:txBody>
-      </p:sp>
-      <p:sp>
-        <p:nvSpPr>
-          <p:cNvPr id="4" name="Flowchart: Connector 3">
-            <a:extLst>
-              <a:ext uri="{FF2B5EF4-FFF2-40B4-BE49-F238E27FC236}">
-                <a16:creationId xmlns:a16="http://schemas.microsoft.com/office/drawing/2014/main" id="{9AEE9498-B63C-E4A7-78A6-8EF4F491E54E}"/>
-              </a:ext>
-            </a:extLst>
-          </p:cNvPr>
-          <p:cNvSpPr/>
-          <p:nvPr/>
-        </p:nvSpPr>
-        <p:spPr>
-          <a:xfrm>
-            <a:off x="1633837" y="701449"/>
-            <a:ext cx="708750" cy="708750"/>
-          </a:xfrm>
-          <a:prstGeom prst="flowChartConnector">
-            <a:avLst/>
-          </a:prstGeom>
-        </p:spPr>
-        <p:style>
-          <a:lnRef idx="2">
-            <a:schemeClr val="accent1">
-              <a:shade val="15000"/>
-            </a:schemeClr>
-          </a:lnRef>
-          <a:fillRef idx="1">
-            <a:schemeClr val="accent1"/>
-          </a:fillRef>
-          <a:effectRef idx="0">
-            <a:schemeClr val="accent1"/>
-          </a:effectRef>
-          <a:fontRef idx="minor">
-            <a:schemeClr val="lt1"/>
-          </a:fontRef>
-        </p:style>
-        <p:txBody>
-          <a:bodyPr rtlCol="0" anchor="ctr"/>
-          <a:lstStyle/>
-          <a:p>
-            <a:pPr algn="ctr"/>
-            <a:r>
-              <a:rPr lang="en-GB" sz="1013" dirty="0"/>
-              <a:t>Project A</a:t>
-            </a:r>
-          </a:p>
-        </p:txBody>
-      </p:sp>
-      <p:sp>
-        <p:nvSpPr>
-          <p:cNvPr id="5" name="Flowchart: Connector 4">
-            <a:extLst>
-              <a:ext uri="{FF2B5EF4-FFF2-40B4-BE49-F238E27FC236}">
-                <a16:creationId xmlns:a16="http://schemas.microsoft.com/office/drawing/2014/main" id="{251267AD-F4C8-0D82-4E98-7073BA612AA8}"/>
-              </a:ext>
-            </a:extLst>
-          </p:cNvPr>
-          <p:cNvSpPr/>
-          <p:nvPr/>
-        </p:nvSpPr>
-        <p:spPr>
-          <a:xfrm>
-            <a:off x="4353034" y="701449"/>
-            <a:ext cx="708750" cy="708750"/>
-          </a:xfrm>
-          <a:prstGeom prst="flowChartConnector">
-            <a:avLst/>
-          </a:prstGeom>
-        </p:spPr>
-        <p:style>
-          <a:lnRef idx="2">
-            <a:schemeClr val="accent1">
-              <a:shade val="15000"/>
-            </a:schemeClr>
-          </a:lnRef>
-          <a:fillRef idx="1">
-            <a:schemeClr val="accent1"/>
-          </a:fillRef>
-          <a:effectRef idx="0">
-            <a:schemeClr val="accent1"/>
-          </a:effectRef>
-          <a:fontRef idx="minor">
-            <a:schemeClr val="lt1"/>
-          </a:fontRef>
-        </p:style>
-        <p:txBody>
-          <a:bodyPr rtlCol="0" anchor="ctr"/>
-          <a:lstStyle/>
-          <a:p>
-            <a:pPr algn="ctr"/>
-            <a:r>
-              <a:rPr lang="en-GB" sz="1013" dirty="0"/>
-              <a:t>Project B</a:t>
-            </a:r>
-          </a:p>
-        </p:txBody>
-      </p:sp>
-      <p:sp>
-        <p:nvSpPr>
-          <p:cNvPr id="6" name="Flowchart: Connector 5">
-            <a:extLst>
-              <a:ext uri="{FF2B5EF4-FFF2-40B4-BE49-F238E27FC236}">
-                <a16:creationId xmlns:a16="http://schemas.microsoft.com/office/drawing/2014/main" id="{17F06332-0E84-9F24-72AF-197DEF7F1B2E}"/>
-              </a:ext>
-            </a:extLst>
-          </p:cNvPr>
-          <p:cNvSpPr/>
-          <p:nvPr/>
-        </p:nvSpPr>
-        <p:spPr>
-          <a:xfrm>
-            <a:off x="3039066" y="2816469"/>
-            <a:ext cx="708750" cy="708750"/>
-          </a:xfrm>
-          <a:prstGeom prst="flowChartConnector">
-            <a:avLst/>
-          </a:prstGeom>
-        </p:spPr>
-        <p:style>
-          <a:lnRef idx="2">
-            <a:schemeClr val="accent1">
-              <a:shade val="15000"/>
-            </a:schemeClr>
-          </a:lnRef>
-          <a:fillRef idx="1">
-            <a:schemeClr val="accent1"/>
-          </a:fillRef>
-          <a:effectRef idx="0">
-            <a:schemeClr val="accent1"/>
-          </a:effectRef>
-          <a:fontRef idx="minor">
-            <a:schemeClr val="lt1"/>
-          </a:fontRef>
-        </p:style>
-        <p:txBody>
-          <a:bodyPr rtlCol="0" anchor="ctr"/>
-          <a:lstStyle/>
-          <a:p>
-            <a:pPr algn="ctr"/>
-            <a:r>
-              <a:rPr lang="en-GB" sz="1013" dirty="0"/>
-              <a:t>Nest AB</a:t>
-            </a:r>
-          </a:p>
-        </p:txBody>
-      </p:sp>
-      <p:sp>
-        <p:nvSpPr>
-          <p:cNvPr id="7" name="Flowchart: Process 6">
-            <a:extLst>
-              <a:ext uri="{FF2B5EF4-FFF2-40B4-BE49-F238E27FC236}">
-                <a16:creationId xmlns:a16="http://schemas.microsoft.com/office/drawing/2014/main" id="{C9584801-51FA-B5AF-3778-4127727CEE0F}"/>
-              </a:ext>
-            </a:extLst>
-          </p:cNvPr>
-          <p:cNvSpPr/>
-          <p:nvPr/>
-        </p:nvSpPr>
-        <p:spPr>
-          <a:xfrm>
-            <a:off x="793224" y="1838352"/>
-            <a:ext cx="504063" cy="540068"/>
-          </a:xfrm>
-          <a:prstGeom prst="flowChartProcess">
-            <a:avLst/>
-          </a:prstGeom>
-          <a:solidFill>
-            <a:srgbClr val="FFC000"/>
-          </a:solidFill>
-        </p:spPr>
-        <p:style>
-          <a:lnRef idx="2">
-            <a:schemeClr val="accent1">
-              <a:shade val="15000"/>
-            </a:schemeClr>
-          </a:lnRef>
-          <a:fillRef idx="1">
-            <a:schemeClr val="accent1"/>
-          </a:fillRef>
-          <a:effectRef idx="0">
-            <a:schemeClr val="accent1"/>
-          </a:effectRef>
-          <a:fontRef idx="minor">
-            <a:schemeClr val="lt1"/>
-          </a:fontRef>
-        </p:style>
-        <p:txBody>
-          <a:bodyPr rtlCol="0" anchor="ctr"/>
-          <a:lstStyle/>
-          <a:p>
-            <a:pPr algn="ctr"/>
-            <a:r>
-              <a:rPr lang="en-GB" sz="1013" dirty="0"/>
-              <a:t>Report A</a:t>
-            </a:r>
-          </a:p>
-        </p:txBody>
-      </p:sp>
-      <p:sp>
-        <p:nvSpPr>
-          <p:cNvPr id="8" name="Flowchart: Process 7">
-            <a:extLst>
-              <a:ext uri="{FF2B5EF4-FFF2-40B4-BE49-F238E27FC236}">
-                <a16:creationId xmlns:a16="http://schemas.microsoft.com/office/drawing/2014/main" id="{6BC59402-3B69-56F0-C367-983C630BD5E9}"/>
-              </a:ext>
-            </a:extLst>
-          </p:cNvPr>
-          <p:cNvSpPr/>
-          <p:nvPr/>
-        </p:nvSpPr>
-        <p:spPr>
-          <a:xfrm>
-            <a:off x="5560713" y="1838352"/>
-            <a:ext cx="504063" cy="540068"/>
-          </a:xfrm>
-          <a:prstGeom prst="flowChartProcess">
-            <a:avLst/>
-          </a:prstGeom>
-          <a:solidFill>
-            <a:srgbClr val="FFC000"/>
-          </a:solidFill>
-        </p:spPr>
-        <p:style>
-          <a:lnRef idx="2">
-            <a:schemeClr val="accent1">
-              <a:shade val="15000"/>
-            </a:schemeClr>
-          </a:lnRef>
-          <a:fillRef idx="1">
-            <a:schemeClr val="accent1"/>
-          </a:fillRef>
-          <a:effectRef idx="0">
-            <a:schemeClr val="accent1"/>
-          </a:effectRef>
-          <a:fontRef idx="minor">
-            <a:schemeClr val="lt1"/>
-          </a:fontRef>
-        </p:style>
-        <p:txBody>
-          <a:bodyPr rtlCol="0" anchor="ctr"/>
-          <a:lstStyle/>
-          <a:p>
-            <a:pPr algn="ctr"/>
-            <a:r>
-              <a:rPr lang="en-GB" sz="1013" dirty="0"/>
-              <a:t>Report B</a:t>
-            </a:r>
-          </a:p>
-        </p:txBody>
-      </p:sp>
-      <p:sp>
-        <p:nvSpPr>
-          <p:cNvPr id="9" name="Flowchart: Process 8">
-            <a:extLst>
-              <a:ext uri="{FF2B5EF4-FFF2-40B4-BE49-F238E27FC236}">
-                <a16:creationId xmlns:a16="http://schemas.microsoft.com/office/drawing/2014/main" id="{58FA13A0-1793-985F-D2FA-E46F753080EA}"/>
-              </a:ext>
-            </a:extLst>
-          </p:cNvPr>
-          <p:cNvSpPr/>
-          <p:nvPr/>
-        </p:nvSpPr>
-        <p:spPr>
-          <a:xfrm>
-            <a:off x="3141409" y="3881951"/>
-            <a:ext cx="504063" cy="540068"/>
-          </a:xfrm>
-          <a:prstGeom prst="flowChartProcess">
-            <a:avLst/>
-          </a:prstGeom>
-          <a:solidFill>
-            <a:srgbClr val="FFC000"/>
-          </a:solidFill>
-        </p:spPr>
-        <p:style>
-          <a:lnRef idx="2">
-            <a:schemeClr val="accent1">
-              <a:shade val="15000"/>
-            </a:schemeClr>
-          </a:lnRef>
-          <a:fillRef idx="1">
-            <a:schemeClr val="accent1"/>
-          </a:fillRef>
-          <a:effectRef idx="0">
-            <a:schemeClr val="accent1"/>
-          </a:effectRef>
-          <a:fontRef idx="minor">
-            <a:schemeClr val="lt1"/>
-          </a:fontRef>
-        </p:style>
-        <p:txBody>
-          <a:bodyPr rtlCol="0" anchor="ctr"/>
-          <a:lstStyle/>
-          <a:p>
-            <a:pPr algn="ctr"/>
-            <a:r>
-              <a:rPr lang="en-GB" sz="1013" dirty="0"/>
-              <a:t>Report AB</a:t>
-            </a:r>
-          </a:p>
-        </p:txBody>
-      </p:sp>
-      <p:sp>
-        <p:nvSpPr>
-          <p:cNvPr id="10" name="Flowchart: Process 9">
-            <a:extLst>
-              <a:ext uri="{FF2B5EF4-FFF2-40B4-BE49-F238E27FC236}">
-                <a16:creationId xmlns:a16="http://schemas.microsoft.com/office/drawing/2014/main" id="{B008FF77-342E-740D-DBAA-20CEFB8B13CC}"/>
-              </a:ext>
-            </a:extLst>
-          </p:cNvPr>
-          <p:cNvSpPr/>
-          <p:nvPr/>
-        </p:nvSpPr>
-        <p:spPr>
-          <a:xfrm>
-            <a:off x="2987698" y="5054627"/>
-            <a:ext cx="814388" cy="540068"/>
-          </a:xfrm>
-          <a:prstGeom prst="flowChartProcess">
-            <a:avLst/>
-          </a:prstGeom>
-          <a:solidFill>
-            <a:srgbClr val="FF0000"/>
-          </a:solidFill>
-        </p:spPr>
-        <p:style>
-          <a:lnRef idx="2">
-            <a:schemeClr val="accent1">
-              <a:shade val="15000"/>
-            </a:schemeClr>
-          </a:lnRef>
-          <a:fillRef idx="1">
-            <a:schemeClr val="accent1"/>
-          </a:fillRef>
-          <a:effectRef idx="0">
-            <a:schemeClr val="accent1"/>
-          </a:effectRef>
-          <a:fontRef idx="minor">
-            <a:schemeClr val="lt1"/>
-          </a:fontRef>
-        </p:style>
-        <p:txBody>
-          <a:bodyPr rtlCol="0" anchor="ctr"/>
-          <a:lstStyle/>
-          <a:p>
-            <a:pPr algn="ctr"/>
-            <a:r>
-              <a:rPr lang="en-GB" sz="1013" dirty="0"/>
-              <a:t>Merged Report AB</a:t>
-            </a:r>
-          </a:p>
-        </p:txBody>
-      </p:sp>
-      <p:cxnSp>
-        <p:nvCxnSpPr>
-          <p:cNvPr id="14" name="Straight Arrow Connector 13">
-            <a:extLst>
-              <a:ext uri="{FF2B5EF4-FFF2-40B4-BE49-F238E27FC236}">
-                <a16:creationId xmlns:a16="http://schemas.microsoft.com/office/drawing/2014/main" id="{935BEB8D-4732-914C-D0C7-EAC285807481}"/>
-              </a:ext>
-            </a:extLst>
-          </p:cNvPr>
-          <p:cNvCxnSpPr>
-            <a:stCxn id="4" idx="5"/>
-            <a:endCxn id="6" idx="1"/>
-          </p:cNvCxnSpPr>
-          <p:nvPr/>
-        </p:nvCxnSpPr>
-        <p:spPr>
-          <a:xfrm>
-            <a:off x="2238793" y="1306405"/>
-            <a:ext cx="904067" cy="1613858"/>
-          </a:xfrm>
-          <a:prstGeom prst="straightConnector1">
-            <a:avLst/>
-          </a:prstGeom>
-          <a:ln>
-            <a:tailEnd type="triangle"/>
-          </a:ln>
-        </p:spPr>
-        <p:style>
-          <a:lnRef idx="2">
-            <a:schemeClr val="accent1"/>
-          </a:lnRef>
-          <a:fillRef idx="0">
-            <a:schemeClr val="accent1"/>
-          </a:fillRef>
-          <a:effectRef idx="1">
-            <a:schemeClr val="accent1"/>
-          </a:effectRef>
-          <a:fontRef idx="minor">
-            <a:schemeClr val="tx1"/>
-          </a:fontRef>
-        </p:style>
-      </p:cxnSp>
-      <p:cxnSp>
-        <p:nvCxnSpPr>
-          <p:cNvPr id="16" name="Straight Arrow Connector 15">
-            <a:extLst>
-              <a:ext uri="{FF2B5EF4-FFF2-40B4-BE49-F238E27FC236}">
-                <a16:creationId xmlns:a16="http://schemas.microsoft.com/office/drawing/2014/main" id="{027EA814-8575-33EC-768D-CFC1AF01766D}"/>
-              </a:ext>
-            </a:extLst>
-          </p:cNvPr>
-          <p:cNvCxnSpPr>
-            <a:stCxn id="5" idx="3"/>
-            <a:endCxn id="6" idx="7"/>
-          </p:cNvCxnSpPr>
-          <p:nvPr/>
-        </p:nvCxnSpPr>
-        <p:spPr>
-          <a:xfrm flipH="1">
-            <a:off x="3644022" y="1306405"/>
-            <a:ext cx="812806" cy="1613858"/>
-          </a:xfrm>
-          <a:prstGeom prst="straightConnector1">
-            <a:avLst/>
-          </a:prstGeom>
-          <a:ln>
-            <a:tailEnd type="triangle"/>
-          </a:ln>
-        </p:spPr>
-        <p:style>
-          <a:lnRef idx="2">
-            <a:schemeClr val="accent1"/>
-          </a:lnRef>
-          <a:fillRef idx="0">
-            <a:schemeClr val="accent1"/>
-          </a:fillRef>
-          <a:effectRef idx="1">
-            <a:schemeClr val="accent1"/>
-          </a:effectRef>
-          <a:fontRef idx="minor">
-            <a:schemeClr val="tx1"/>
-          </a:fontRef>
-        </p:style>
-      </p:cxnSp>
-      <p:cxnSp>
-        <p:nvCxnSpPr>
-          <p:cNvPr id="17" name="Straight Arrow Connector 16">
-            <a:extLst>
-              <a:ext uri="{FF2B5EF4-FFF2-40B4-BE49-F238E27FC236}">
-                <a16:creationId xmlns:a16="http://schemas.microsoft.com/office/drawing/2014/main" id="{A026C631-B551-5DD5-3C68-ADEA33A7BA05}"/>
-              </a:ext>
-            </a:extLst>
-          </p:cNvPr>
-          <p:cNvCxnSpPr>
-            <a:cxnSpLocks/>
-            <a:stCxn id="4" idx="3"/>
-            <a:endCxn id="7" idx="0"/>
-          </p:cNvCxnSpPr>
-          <p:nvPr/>
-        </p:nvCxnSpPr>
-        <p:spPr>
-          <a:xfrm flipH="1">
-            <a:off x="1045256" y="1306405"/>
-            <a:ext cx="692375" cy="531947"/>
-          </a:xfrm>
-          <a:prstGeom prst="straightConnector1">
-            <a:avLst/>
-          </a:prstGeom>
-          <a:ln>
-            <a:tailEnd type="triangle"/>
-          </a:ln>
-        </p:spPr>
-        <p:style>
-          <a:lnRef idx="2">
-            <a:schemeClr val="accent1"/>
-          </a:lnRef>
-          <a:fillRef idx="0">
-            <a:schemeClr val="accent1"/>
-          </a:fillRef>
-          <a:effectRef idx="1">
-            <a:schemeClr val="accent1"/>
-          </a:effectRef>
-          <a:fontRef idx="minor">
-            <a:schemeClr val="tx1"/>
-          </a:fontRef>
-        </p:style>
-      </p:cxnSp>
-      <p:cxnSp>
-        <p:nvCxnSpPr>
-          <p:cNvPr id="20" name="Straight Arrow Connector 19">
-            <a:extLst>
-              <a:ext uri="{FF2B5EF4-FFF2-40B4-BE49-F238E27FC236}">
-                <a16:creationId xmlns:a16="http://schemas.microsoft.com/office/drawing/2014/main" id="{380804EB-BE07-F099-ED19-2F32D8DC2D30}"/>
-              </a:ext>
-            </a:extLst>
-          </p:cNvPr>
-          <p:cNvCxnSpPr>
-            <a:cxnSpLocks/>
-            <a:stCxn id="5" idx="5"/>
-            <a:endCxn id="8" idx="0"/>
-          </p:cNvCxnSpPr>
-          <p:nvPr/>
-        </p:nvCxnSpPr>
-        <p:spPr>
-          <a:xfrm>
-            <a:off x="4957990" y="1306405"/>
-            <a:ext cx="854755" cy="531947"/>
-          </a:xfrm>
-          <a:prstGeom prst="straightConnector1">
-            <a:avLst/>
-          </a:prstGeom>
-          <a:ln>
-            <a:tailEnd type="triangle"/>
-          </a:ln>
-        </p:spPr>
-        <p:style>
-          <a:lnRef idx="2">
-            <a:schemeClr val="accent1"/>
-          </a:lnRef>
-          <a:fillRef idx="0">
-            <a:schemeClr val="accent1"/>
-          </a:fillRef>
-          <a:effectRef idx="1">
-            <a:schemeClr val="accent1"/>
-          </a:effectRef>
-          <a:fontRef idx="minor">
-            <a:schemeClr val="tx1"/>
-          </a:fontRef>
-        </p:style>
-      </p:cxnSp>
-      <p:cxnSp>
-        <p:nvCxnSpPr>
-          <p:cNvPr id="29" name="Straight Arrow Connector 28">
-            <a:extLst>
-              <a:ext uri="{FF2B5EF4-FFF2-40B4-BE49-F238E27FC236}">
-                <a16:creationId xmlns:a16="http://schemas.microsoft.com/office/drawing/2014/main" id="{0185773B-D9BB-1454-2622-5F1AF7D4E1E9}"/>
-              </a:ext>
-            </a:extLst>
-          </p:cNvPr>
-          <p:cNvCxnSpPr>
-            <a:cxnSpLocks/>
-            <a:stCxn id="6" idx="4"/>
-            <a:endCxn id="9" idx="0"/>
-          </p:cNvCxnSpPr>
-          <p:nvPr/>
-        </p:nvCxnSpPr>
-        <p:spPr>
-          <a:xfrm>
-            <a:off x="3393441" y="3525219"/>
-            <a:ext cx="0" cy="356732"/>
-          </a:xfrm>
-          <a:prstGeom prst="straightConnector1">
-            <a:avLst/>
-          </a:prstGeom>
-          <a:ln>
-            <a:tailEnd type="triangle"/>
-          </a:ln>
-        </p:spPr>
-        <p:style>
-          <a:lnRef idx="2">
-            <a:schemeClr val="accent1"/>
-          </a:lnRef>
-          <a:fillRef idx="0">
-            <a:schemeClr val="accent1"/>
-          </a:fillRef>
-          <a:effectRef idx="1">
-            <a:schemeClr val="accent1"/>
-          </a:effectRef>
-          <a:fontRef idx="minor">
-            <a:schemeClr val="tx1"/>
-          </a:fontRef>
-        </p:style>
-      </p:cxnSp>
-      <p:cxnSp>
-        <p:nvCxnSpPr>
-          <p:cNvPr id="32" name="Straight Arrow Connector 31">
-            <a:extLst>
-              <a:ext uri="{FF2B5EF4-FFF2-40B4-BE49-F238E27FC236}">
-                <a16:creationId xmlns:a16="http://schemas.microsoft.com/office/drawing/2014/main" id="{D28FAE91-B91D-CEF0-E4CA-994F9E3E37B0}"/>
-              </a:ext>
-            </a:extLst>
-          </p:cNvPr>
-          <p:cNvCxnSpPr>
-            <a:cxnSpLocks/>
-            <a:stCxn id="9" idx="2"/>
-            <a:endCxn id="10" idx="0"/>
-          </p:cNvCxnSpPr>
-          <p:nvPr/>
-        </p:nvCxnSpPr>
-        <p:spPr>
-          <a:xfrm>
-            <a:off x="3393441" y="4422019"/>
-            <a:ext cx="1451" cy="632608"/>
-          </a:xfrm>
-          <a:prstGeom prst="straightConnector1">
-            <a:avLst/>
-          </a:prstGeom>
-          <a:ln>
-            <a:tailEnd type="triangle"/>
-          </a:ln>
-        </p:spPr>
-        <p:style>
-          <a:lnRef idx="2">
-            <a:schemeClr val="accent1"/>
-          </a:lnRef>
-          <a:fillRef idx="0">
-            <a:schemeClr val="accent1"/>
-          </a:fillRef>
-          <a:effectRef idx="1">
-            <a:schemeClr val="accent1"/>
-          </a:effectRef>
-          <a:fontRef idx="minor">
-            <a:schemeClr val="tx1"/>
-          </a:fontRef>
-        </p:style>
-      </p:cxnSp>
-      <p:cxnSp>
-        <p:nvCxnSpPr>
-          <p:cNvPr id="40" name="Straight Connector 39">
-            <a:extLst>
-              <a:ext uri="{FF2B5EF4-FFF2-40B4-BE49-F238E27FC236}">
-                <a16:creationId xmlns:a16="http://schemas.microsoft.com/office/drawing/2014/main" id="{B4A967A9-D58D-4D32-A3D0-17EA9B7CEA9D}"/>
-              </a:ext>
-            </a:extLst>
-          </p:cNvPr>
-          <p:cNvCxnSpPr>
-            <a:cxnSpLocks/>
-            <a:stCxn id="7" idx="2"/>
-          </p:cNvCxnSpPr>
-          <p:nvPr/>
-        </p:nvCxnSpPr>
-        <p:spPr>
-          <a:xfrm>
-            <a:off x="1045256" y="2378420"/>
-            <a:ext cx="0" cy="2250730"/>
-          </a:xfrm>
-          <a:prstGeom prst="line">
-            <a:avLst/>
-          </a:prstGeom>
-        </p:spPr>
-        <p:style>
-          <a:lnRef idx="2">
-            <a:schemeClr val="accent1"/>
-          </a:lnRef>
-          <a:fillRef idx="0">
-            <a:schemeClr val="accent1"/>
-          </a:fillRef>
-          <a:effectRef idx="1">
-            <a:schemeClr val="accent1"/>
-          </a:effectRef>
-          <a:fontRef idx="minor">
-            <a:schemeClr val="tx1"/>
-          </a:fontRef>
-        </p:style>
-      </p:cxnSp>
-      <p:cxnSp>
-        <p:nvCxnSpPr>
-          <p:cNvPr id="43" name="Straight Connector 42">
-            <a:extLst>
-              <a:ext uri="{FF2B5EF4-FFF2-40B4-BE49-F238E27FC236}">
-                <a16:creationId xmlns:a16="http://schemas.microsoft.com/office/drawing/2014/main" id="{AC3BCC0D-3705-4EB9-1893-B974CE49DD40}"/>
-              </a:ext>
-            </a:extLst>
-          </p:cNvPr>
-          <p:cNvCxnSpPr>
-            <a:cxnSpLocks/>
-            <a:stCxn id="8" idx="2"/>
-          </p:cNvCxnSpPr>
-          <p:nvPr/>
-        </p:nvCxnSpPr>
-        <p:spPr>
-          <a:xfrm>
-            <a:off x="5812745" y="2378420"/>
-            <a:ext cx="32673" cy="2250730"/>
-          </a:xfrm>
-          <a:prstGeom prst="line">
-            <a:avLst/>
-          </a:prstGeom>
-        </p:spPr>
-        <p:style>
-          <a:lnRef idx="2">
-            <a:schemeClr val="accent1"/>
-          </a:lnRef>
-          <a:fillRef idx="0">
-            <a:schemeClr val="accent1"/>
-          </a:fillRef>
-          <a:effectRef idx="1">
-            <a:schemeClr val="accent1"/>
-          </a:effectRef>
-          <a:fontRef idx="minor">
-            <a:schemeClr val="tx1"/>
-          </a:fontRef>
-        </p:style>
-      </p:cxnSp>
-      <p:cxnSp>
-        <p:nvCxnSpPr>
-          <p:cNvPr id="47" name="Straight Connector 46">
-            <a:extLst>
-              <a:ext uri="{FF2B5EF4-FFF2-40B4-BE49-F238E27FC236}">
-                <a16:creationId xmlns:a16="http://schemas.microsoft.com/office/drawing/2014/main" id="{72617FF4-B38E-4A3C-AEC9-5BEB9E93CE43}"/>
-              </a:ext>
-            </a:extLst>
-          </p:cNvPr>
-          <p:cNvCxnSpPr>
-            <a:cxnSpLocks/>
-          </p:cNvCxnSpPr>
-          <p:nvPr/>
-        </p:nvCxnSpPr>
-        <p:spPr>
-          <a:xfrm flipH="1">
-            <a:off x="1045255" y="4629150"/>
-            <a:ext cx="4783826" cy="0"/>
-          </a:xfrm>
-          <a:prstGeom prst="line">
-            <a:avLst/>
-          </a:prstGeom>
-        </p:spPr>
-        <p:style>
-          <a:lnRef idx="2">
-            <a:schemeClr val="accent1"/>
-          </a:lnRef>
-          <a:fillRef idx="0">
-            <a:schemeClr val="accent1"/>
-          </a:fillRef>
-          <a:effectRef idx="1">
-            <a:schemeClr val="accent1"/>
-          </a:effectRef>
-          <a:fontRef idx="minor">
-            <a:schemeClr val="tx1"/>
-          </a:fontRef>
-        </p:style>
-      </p:cxnSp>
+        </p:grpSpPr>
+        <p:sp>
+          <p:nvSpPr>
+            <p:cNvPr id="73" name="Rectangle: Rounded Corners 72">
+              <a:extLst>
+                <a:ext uri="{FF2B5EF4-FFF2-40B4-BE49-F238E27FC236}">
+                  <a16:creationId xmlns:a16="http://schemas.microsoft.com/office/drawing/2014/main" id="{6639416A-2A9D-61B1-EA8F-36199F60F9F2}"/>
+                </a:ext>
+              </a:extLst>
+            </p:cNvPr>
+            <p:cNvSpPr/>
+            <p:nvPr/>
+          </p:nvSpPr>
+          <p:spPr>
+            <a:xfrm>
+              <a:off x="354330" y="4837525"/>
+              <a:ext cx="6145200" cy="842400"/>
+            </a:xfrm>
+            <a:prstGeom prst="roundRect">
+              <a:avLst/>
+            </a:prstGeom>
+            <a:solidFill>
+              <a:schemeClr val="accent1">
+                <a:alpha val="30000"/>
+              </a:schemeClr>
+            </a:solidFill>
+          </p:spPr>
+          <p:style>
+            <a:lnRef idx="2">
+              <a:schemeClr val="accent1">
+                <a:shade val="15000"/>
+              </a:schemeClr>
+            </a:lnRef>
+            <a:fillRef idx="1">
+              <a:schemeClr val="accent1"/>
+            </a:fillRef>
+            <a:effectRef idx="0">
+              <a:schemeClr val="accent1"/>
+            </a:effectRef>
+            <a:fontRef idx="minor">
+              <a:schemeClr val="lt1"/>
+            </a:fontRef>
+          </p:style>
+          <p:txBody>
+            <a:bodyPr rtlCol="0" anchor="ctr"/>
+            <a:lstStyle/>
+            <a:p>
+              <a:pPr algn="ctr"/>
+              <a:endParaRPr lang="en-GB" dirty="0"/>
+            </a:p>
+          </p:txBody>
+        </p:sp>
+        <p:sp>
+          <p:nvSpPr>
+            <p:cNvPr id="72" name="Rectangle: Rounded Corners 71">
+              <a:extLst>
+                <a:ext uri="{FF2B5EF4-FFF2-40B4-BE49-F238E27FC236}">
+                  <a16:creationId xmlns:a16="http://schemas.microsoft.com/office/drawing/2014/main" id="{64DFD2B6-66BE-A072-8A16-B17CED3BC432}"/>
+                </a:ext>
+              </a:extLst>
+            </p:cNvPr>
+            <p:cNvSpPr/>
+            <p:nvPr/>
+          </p:nvSpPr>
+          <p:spPr>
+            <a:xfrm>
+              <a:off x="354330" y="3780759"/>
+              <a:ext cx="6145200" cy="842400"/>
+            </a:xfrm>
+            <a:prstGeom prst="roundRect">
+              <a:avLst/>
+            </a:prstGeom>
+            <a:solidFill>
+              <a:schemeClr val="accent1">
+                <a:alpha val="30000"/>
+              </a:schemeClr>
+            </a:solidFill>
+          </p:spPr>
+          <p:style>
+            <a:lnRef idx="2">
+              <a:schemeClr val="accent1">
+                <a:shade val="15000"/>
+              </a:schemeClr>
+            </a:lnRef>
+            <a:fillRef idx="1">
+              <a:schemeClr val="accent1"/>
+            </a:fillRef>
+            <a:effectRef idx="0">
+              <a:schemeClr val="accent1"/>
+            </a:effectRef>
+            <a:fontRef idx="minor">
+              <a:schemeClr val="lt1"/>
+            </a:fontRef>
+          </p:style>
+          <p:txBody>
+            <a:bodyPr rtlCol="0" anchor="ctr"/>
+            <a:lstStyle/>
+            <a:p>
+              <a:pPr algn="ctr"/>
+              <a:endParaRPr lang="en-GB" dirty="0"/>
+            </a:p>
+          </p:txBody>
+        </p:sp>
+        <p:sp>
+          <p:nvSpPr>
+            <p:cNvPr id="57" name="Rectangle: Rounded Corners 56">
+              <a:extLst>
+                <a:ext uri="{FF2B5EF4-FFF2-40B4-BE49-F238E27FC236}">
+                  <a16:creationId xmlns:a16="http://schemas.microsoft.com/office/drawing/2014/main" id="{0A37C06B-E657-1F5D-6517-D3CE31FDFF0E}"/>
+                </a:ext>
+              </a:extLst>
+            </p:cNvPr>
+            <p:cNvSpPr/>
+            <p:nvPr/>
+          </p:nvSpPr>
+          <p:spPr>
+            <a:xfrm>
+              <a:off x="352316" y="1665817"/>
+              <a:ext cx="6145200" cy="842400"/>
+            </a:xfrm>
+            <a:prstGeom prst="roundRect">
+              <a:avLst/>
+            </a:prstGeom>
+            <a:solidFill>
+              <a:schemeClr val="accent1">
+                <a:alpha val="30000"/>
+              </a:schemeClr>
+            </a:solidFill>
+          </p:spPr>
+          <p:style>
+            <a:lnRef idx="2">
+              <a:schemeClr val="accent1">
+                <a:shade val="15000"/>
+              </a:schemeClr>
+            </a:lnRef>
+            <a:fillRef idx="1">
+              <a:schemeClr val="accent1"/>
+            </a:fillRef>
+            <a:effectRef idx="0">
+              <a:schemeClr val="accent1"/>
+            </a:effectRef>
+            <a:fontRef idx="minor">
+              <a:schemeClr val="lt1"/>
+            </a:fontRef>
+          </p:style>
+          <p:txBody>
+            <a:bodyPr rtlCol="0" anchor="ctr"/>
+            <a:lstStyle/>
+            <a:p>
+              <a:pPr algn="ctr"/>
+              <a:endParaRPr lang="en-GB" dirty="0"/>
+            </a:p>
+          </p:txBody>
+        </p:sp>
+        <p:sp>
+          <p:nvSpPr>
+            <p:cNvPr id="58" name="Rectangle: Rounded Corners 57">
+              <a:extLst>
+                <a:ext uri="{FF2B5EF4-FFF2-40B4-BE49-F238E27FC236}">
+                  <a16:creationId xmlns:a16="http://schemas.microsoft.com/office/drawing/2014/main" id="{7E947829-6503-7B98-E985-C491D876371A}"/>
+                </a:ext>
+              </a:extLst>
+            </p:cNvPr>
+            <p:cNvSpPr/>
+            <p:nvPr/>
+          </p:nvSpPr>
+          <p:spPr>
+            <a:xfrm>
+              <a:off x="354330" y="2722549"/>
+              <a:ext cx="6145200" cy="842400"/>
+            </a:xfrm>
+            <a:prstGeom prst="roundRect">
+              <a:avLst/>
+            </a:prstGeom>
+            <a:solidFill>
+              <a:schemeClr val="accent1">
+                <a:alpha val="30000"/>
+              </a:schemeClr>
+            </a:solidFill>
+          </p:spPr>
+          <p:style>
+            <a:lnRef idx="2">
+              <a:schemeClr val="accent1">
+                <a:shade val="15000"/>
+              </a:schemeClr>
+            </a:lnRef>
+            <a:fillRef idx="1">
+              <a:schemeClr val="accent1"/>
+            </a:fillRef>
+            <a:effectRef idx="0">
+              <a:schemeClr val="accent1"/>
+            </a:effectRef>
+            <a:fontRef idx="minor">
+              <a:schemeClr val="lt1"/>
+            </a:fontRef>
+          </p:style>
+          <p:txBody>
+            <a:bodyPr rtlCol="0" anchor="ctr"/>
+            <a:lstStyle/>
+            <a:p>
+              <a:pPr algn="ctr"/>
+              <a:endParaRPr lang="en-GB" dirty="0"/>
+            </a:p>
+          </p:txBody>
+        </p:sp>
+        <p:sp>
+          <p:nvSpPr>
+            <p:cNvPr id="54" name="Rectangle: Rounded Corners 53">
+              <a:extLst>
+                <a:ext uri="{FF2B5EF4-FFF2-40B4-BE49-F238E27FC236}">
+                  <a16:creationId xmlns:a16="http://schemas.microsoft.com/office/drawing/2014/main" id="{6334BB8A-DA23-CFB5-4299-9DC5861702DB}"/>
+                </a:ext>
+              </a:extLst>
+            </p:cNvPr>
+            <p:cNvSpPr/>
+            <p:nvPr/>
+          </p:nvSpPr>
+          <p:spPr>
+            <a:xfrm>
+              <a:off x="346710" y="624992"/>
+              <a:ext cx="6145312" cy="841075"/>
+            </a:xfrm>
+            <a:prstGeom prst="roundRect">
+              <a:avLst/>
+            </a:prstGeom>
+            <a:solidFill>
+              <a:schemeClr val="accent1">
+                <a:alpha val="30000"/>
+              </a:schemeClr>
+            </a:solidFill>
+          </p:spPr>
+          <p:style>
+            <a:lnRef idx="2">
+              <a:schemeClr val="accent1">
+                <a:shade val="15000"/>
+              </a:schemeClr>
+            </a:lnRef>
+            <a:fillRef idx="1">
+              <a:schemeClr val="accent1"/>
+            </a:fillRef>
+            <a:effectRef idx="0">
+              <a:schemeClr val="accent1"/>
+            </a:effectRef>
+            <a:fontRef idx="minor">
+              <a:schemeClr val="lt1"/>
+            </a:fontRef>
+          </p:style>
+          <p:txBody>
+            <a:bodyPr rtlCol="0" anchor="ctr"/>
+            <a:lstStyle/>
+            <a:p>
+              <a:pPr algn="ctr"/>
+              <a:endParaRPr lang="en-GB" dirty="0"/>
+            </a:p>
+          </p:txBody>
+        </p:sp>
+        <p:sp>
+          <p:nvSpPr>
+            <p:cNvPr id="4" name="Flowchart: Connector 3">
+              <a:extLst>
+                <a:ext uri="{FF2B5EF4-FFF2-40B4-BE49-F238E27FC236}">
+                  <a16:creationId xmlns:a16="http://schemas.microsoft.com/office/drawing/2014/main" id="{9AEE9498-B63C-E4A7-78A6-8EF4F491E54E}"/>
+                </a:ext>
+              </a:extLst>
+            </p:cNvPr>
+            <p:cNvSpPr/>
+            <p:nvPr/>
+          </p:nvSpPr>
+          <p:spPr>
+            <a:xfrm>
+              <a:off x="1636760" y="785269"/>
+              <a:ext cx="1003827" cy="553893"/>
+            </a:xfrm>
+            <a:prstGeom prst="flowChartConnector">
+              <a:avLst/>
+            </a:prstGeom>
+          </p:spPr>
+          <p:style>
+            <a:lnRef idx="2">
+              <a:schemeClr val="accent1">
+                <a:shade val="15000"/>
+              </a:schemeClr>
+            </a:lnRef>
+            <a:fillRef idx="1">
+              <a:schemeClr val="accent1"/>
+            </a:fillRef>
+            <a:effectRef idx="0">
+              <a:schemeClr val="accent1"/>
+            </a:effectRef>
+            <a:fontRef idx="minor">
+              <a:schemeClr val="lt1"/>
+            </a:fontRef>
+          </p:style>
+          <p:txBody>
+            <a:bodyPr rtlCol="0" anchor="ctr"/>
+            <a:lstStyle/>
+            <a:p>
+              <a:pPr algn="ctr"/>
+              <a:r>
+                <a:rPr lang="en-GB" sz="1013" dirty="0"/>
+                <a:t>Design Project A</a:t>
+              </a:r>
+            </a:p>
+          </p:txBody>
+        </p:sp>
+        <p:sp>
+          <p:nvSpPr>
+            <p:cNvPr id="5" name="Flowchart: Connector 4">
+              <a:extLst>
+                <a:ext uri="{FF2B5EF4-FFF2-40B4-BE49-F238E27FC236}">
+                  <a16:creationId xmlns:a16="http://schemas.microsoft.com/office/drawing/2014/main" id="{251267AD-F4C8-0D82-4E98-7073BA612AA8}"/>
+                </a:ext>
+              </a:extLst>
+            </p:cNvPr>
+            <p:cNvSpPr/>
+            <p:nvPr/>
+          </p:nvSpPr>
+          <p:spPr>
+            <a:xfrm>
+              <a:off x="4353033" y="785269"/>
+              <a:ext cx="1003827" cy="553893"/>
+            </a:xfrm>
+            <a:prstGeom prst="flowChartConnector">
+              <a:avLst/>
+            </a:prstGeom>
+          </p:spPr>
+          <p:style>
+            <a:lnRef idx="2">
+              <a:schemeClr val="accent1">
+                <a:shade val="15000"/>
+              </a:schemeClr>
+            </a:lnRef>
+            <a:fillRef idx="1">
+              <a:schemeClr val="accent1"/>
+            </a:fillRef>
+            <a:effectRef idx="0">
+              <a:schemeClr val="accent1"/>
+            </a:effectRef>
+            <a:fontRef idx="minor">
+              <a:schemeClr val="lt1"/>
+            </a:fontRef>
+          </p:style>
+          <p:txBody>
+            <a:bodyPr rtlCol="0" anchor="ctr"/>
+            <a:lstStyle/>
+            <a:p>
+              <a:pPr algn="ctr"/>
+              <a:r>
+                <a:rPr lang="en-GB" sz="1013" dirty="0"/>
+                <a:t>Design Project B</a:t>
+              </a:r>
+            </a:p>
+          </p:txBody>
+        </p:sp>
+        <p:sp>
+          <p:nvSpPr>
+            <p:cNvPr id="6" name="Flowchart: Connector 5">
+              <a:extLst>
+                <a:ext uri="{FF2B5EF4-FFF2-40B4-BE49-F238E27FC236}">
+                  <a16:creationId xmlns:a16="http://schemas.microsoft.com/office/drawing/2014/main" id="{17F06332-0E84-9F24-72AF-197DEF7F1B2E}"/>
+                </a:ext>
+              </a:extLst>
+            </p:cNvPr>
+            <p:cNvSpPr/>
+            <p:nvPr/>
+          </p:nvSpPr>
+          <p:spPr>
+            <a:xfrm>
+              <a:off x="2921265" y="2887475"/>
+              <a:ext cx="1147286" cy="584351"/>
+            </a:xfrm>
+            <a:prstGeom prst="flowChartConnector">
+              <a:avLst/>
+            </a:prstGeom>
+            <a:solidFill>
+              <a:schemeClr val="accent3"/>
+            </a:solidFill>
+          </p:spPr>
+          <p:style>
+            <a:lnRef idx="2">
+              <a:schemeClr val="accent1">
+                <a:shade val="15000"/>
+              </a:schemeClr>
+            </a:lnRef>
+            <a:fillRef idx="1">
+              <a:schemeClr val="accent1"/>
+            </a:fillRef>
+            <a:effectRef idx="0">
+              <a:schemeClr val="accent1"/>
+            </a:effectRef>
+            <a:fontRef idx="minor">
+              <a:schemeClr val="lt1"/>
+            </a:fontRef>
+          </p:style>
+          <p:txBody>
+            <a:bodyPr rtlCol="0" anchor="ctr"/>
+            <a:lstStyle/>
+            <a:p>
+              <a:pPr algn="ctr"/>
+              <a:r>
+                <a:rPr lang="en-GB" sz="1013" dirty="0"/>
+                <a:t>Nest Project AB</a:t>
+              </a:r>
+            </a:p>
+          </p:txBody>
+        </p:sp>
+        <p:sp>
+          <p:nvSpPr>
+            <p:cNvPr id="7" name="Flowchart: Process 6">
+              <a:extLst>
+                <a:ext uri="{FF2B5EF4-FFF2-40B4-BE49-F238E27FC236}">
+                  <a16:creationId xmlns:a16="http://schemas.microsoft.com/office/drawing/2014/main" id="{C9584801-51FA-B5AF-3778-4127727CEE0F}"/>
+                </a:ext>
+              </a:extLst>
+            </p:cNvPr>
+            <p:cNvSpPr/>
+            <p:nvPr/>
+          </p:nvSpPr>
+          <p:spPr>
+            <a:xfrm>
+              <a:off x="793224" y="1889760"/>
+              <a:ext cx="679188" cy="412460"/>
+            </a:xfrm>
+            <a:prstGeom prst="flowChartProcess">
+              <a:avLst/>
+            </a:prstGeom>
+            <a:solidFill>
+              <a:srgbClr val="E6AF00"/>
+            </a:solidFill>
+          </p:spPr>
+          <p:style>
+            <a:lnRef idx="2">
+              <a:schemeClr val="accent1">
+                <a:shade val="15000"/>
+              </a:schemeClr>
+            </a:lnRef>
+            <a:fillRef idx="1">
+              <a:schemeClr val="accent1"/>
+            </a:fillRef>
+            <a:effectRef idx="0">
+              <a:schemeClr val="accent1"/>
+            </a:effectRef>
+            <a:fontRef idx="minor">
+              <a:schemeClr val="lt1"/>
+            </a:fontRef>
+          </p:style>
+          <p:txBody>
+            <a:bodyPr rtlCol="0" anchor="ctr"/>
+            <a:lstStyle/>
+            <a:p>
+              <a:pPr algn="ctr"/>
+              <a:r>
+                <a:rPr lang="en-GB" sz="1013" dirty="0"/>
+                <a:t>Design Report A</a:t>
+              </a:r>
+            </a:p>
+          </p:txBody>
+        </p:sp>
+        <p:sp>
+          <p:nvSpPr>
+            <p:cNvPr id="8" name="Flowchart: Process 7">
+              <a:extLst>
+                <a:ext uri="{FF2B5EF4-FFF2-40B4-BE49-F238E27FC236}">
+                  <a16:creationId xmlns:a16="http://schemas.microsoft.com/office/drawing/2014/main" id="{6BC59402-3B69-56F0-C367-983C630BD5E9}"/>
+                </a:ext>
+              </a:extLst>
+            </p:cNvPr>
+            <p:cNvSpPr/>
+            <p:nvPr/>
+          </p:nvSpPr>
+          <p:spPr>
+            <a:xfrm>
+              <a:off x="5356861" y="1889760"/>
+              <a:ext cx="707916" cy="412460"/>
+            </a:xfrm>
+            <a:prstGeom prst="flowChartProcess">
+              <a:avLst/>
+            </a:prstGeom>
+            <a:solidFill>
+              <a:srgbClr val="E6AF00"/>
+            </a:solidFill>
+          </p:spPr>
+          <p:style>
+            <a:lnRef idx="2">
+              <a:schemeClr val="accent1">
+                <a:shade val="15000"/>
+              </a:schemeClr>
+            </a:lnRef>
+            <a:fillRef idx="1">
+              <a:schemeClr val="accent1"/>
+            </a:fillRef>
+            <a:effectRef idx="0">
+              <a:schemeClr val="accent1"/>
+            </a:effectRef>
+            <a:fontRef idx="minor">
+              <a:schemeClr val="lt1"/>
+            </a:fontRef>
+          </p:style>
+          <p:txBody>
+            <a:bodyPr rtlCol="0" anchor="ctr"/>
+            <a:lstStyle/>
+            <a:p>
+              <a:pPr algn="ctr"/>
+              <a:r>
+                <a:rPr lang="en-GB" sz="1013" dirty="0"/>
+                <a:t>Design Report B</a:t>
+              </a:r>
+            </a:p>
+          </p:txBody>
+        </p:sp>
+        <p:sp>
+          <p:nvSpPr>
+            <p:cNvPr id="9" name="Flowchart: Process 8">
+              <a:extLst>
+                <a:ext uri="{FF2B5EF4-FFF2-40B4-BE49-F238E27FC236}">
+                  <a16:creationId xmlns:a16="http://schemas.microsoft.com/office/drawing/2014/main" id="{58FA13A0-1793-985F-D2FA-E46F753080EA}"/>
+                </a:ext>
+              </a:extLst>
+            </p:cNvPr>
+            <p:cNvSpPr/>
+            <p:nvPr/>
+          </p:nvSpPr>
+          <p:spPr>
+            <a:xfrm>
+              <a:off x="3099651" y="3945258"/>
+              <a:ext cx="790511" cy="540068"/>
+            </a:xfrm>
+            <a:prstGeom prst="flowChartProcess">
+              <a:avLst/>
+            </a:prstGeom>
+            <a:solidFill>
+              <a:schemeClr val="accent2">
+                <a:lumMod val="75000"/>
+              </a:schemeClr>
+            </a:solidFill>
+          </p:spPr>
+          <p:style>
+            <a:lnRef idx="2">
+              <a:schemeClr val="accent1">
+                <a:shade val="15000"/>
+              </a:schemeClr>
+            </a:lnRef>
+            <a:fillRef idx="1">
+              <a:schemeClr val="accent1"/>
+            </a:fillRef>
+            <a:effectRef idx="0">
+              <a:schemeClr val="accent1"/>
+            </a:effectRef>
+            <a:fontRef idx="minor">
+              <a:schemeClr val="lt1"/>
+            </a:fontRef>
+          </p:style>
+          <p:txBody>
+            <a:bodyPr rtlCol="0" anchor="ctr"/>
+            <a:lstStyle/>
+            <a:p>
+              <a:pPr algn="ctr"/>
+              <a:r>
+                <a:rPr lang="en-GB" sz="1013" dirty="0"/>
+                <a:t>Nest Report AB</a:t>
+              </a:r>
+            </a:p>
+          </p:txBody>
+        </p:sp>
+        <p:sp>
+          <p:nvSpPr>
+            <p:cNvPr id="10" name="Flowchart: Process 9">
+              <a:extLst>
+                <a:ext uri="{FF2B5EF4-FFF2-40B4-BE49-F238E27FC236}">
+                  <a16:creationId xmlns:a16="http://schemas.microsoft.com/office/drawing/2014/main" id="{B008FF77-342E-740D-DBAA-20CEFB8B13CC}"/>
+                </a:ext>
+              </a:extLst>
+            </p:cNvPr>
+            <p:cNvSpPr/>
+            <p:nvPr/>
+          </p:nvSpPr>
+          <p:spPr>
+            <a:xfrm>
+              <a:off x="3087713" y="5049860"/>
+              <a:ext cx="814388" cy="540068"/>
+            </a:xfrm>
+            <a:prstGeom prst="flowChartProcess">
+              <a:avLst/>
+            </a:prstGeom>
+            <a:solidFill>
+              <a:srgbClr val="FF0000"/>
+            </a:solidFill>
+          </p:spPr>
+          <p:style>
+            <a:lnRef idx="2">
+              <a:schemeClr val="accent1">
+                <a:shade val="15000"/>
+              </a:schemeClr>
+            </a:lnRef>
+            <a:fillRef idx="1">
+              <a:schemeClr val="accent1"/>
+            </a:fillRef>
+            <a:effectRef idx="0">
+              <a:schemeClr val="accent1"/>
+            </a:effectRef>
+            <a:fontRef idx="minor">
+              <a:schemeClr val="lt1"/>
+            </a:fontRef>
+          </p:style>
+          <p:txBody>
+            <a:bodyPr rtlCol="0" anchor="ctr"/>
+            <a:lstStyle/>
+            <a:p>
+              <a:pPr algn="ctr"/>
+              <a:r>
+                <a:rPr lang="en-GB" sz="1013" dirty="0"/>
+                <a:t>Merged Report AB</a:t>
+              </a:r>
+            </a:p>
+          </p:txBody>
+        </p:sp>
+        <p:cxnSp>
+          <p:nvCxnSpPr>
+            <p:cNvPr id="14" name="Straight Arrow Connector 13">
+              <a:extLst>
+                <a:ext uri="{FF2B5EF4-FFF2-40B4-BE49-F238E27FC236}">
+                  <a16:creationId xmlns:a16="http://schemas.microsoft.com/office/drawing/2014/main" id="{935BEB8D-4732-914C-D0C7-EAC285807481}"/>
+                </a:ext>
+              </a:extLst>
+            </p:cNvPr>
+            <p:cNvCxnSpPr>
+              <a:cxnSpLocks/>
+              <a:stCxn id="4" idx="5"/>
+              <a:endCxn id="6" idx="1"/>
+            </p:cNvCxnSpPr>
+            <p:nvPr/>
+          </p:nvCxnSpPr>
+          <p:spPr>
+            <a:xfrm>
+              <a:off x="2493580" y="1258046"/>
+              <a:ext cx="595701" cy="1715005"/>
+            </a:xfrm>
+            <a:prstGeom prst="straightConnector1">
+              <a:avLst/>
+            </a:prstGeom>
+            <a:ln>
+              <a:tailEnd type="triangle"/>
+            </a:ln>
+          </p:spPr>
+          <p:style>
+            <a:lnRef idx="2">
+              <a:schemeClr val="accent1"/>
+            </a:lnRef>
+            <a:fillRef idx="0">
+              <a:schemeClr val="accent1"/>
+            </a:fillRef>
+            <a:effectRef idx="1">
+              <a:schemeClr val="accent1"/>
+            </a:effectRef>
+            <a:fontRef idx="minor">
+              <a:schemeClr val="tx1"/>
+            </a:fontRef>
+          </p:style>
+        </p:cxnSp>
+        <p:cxnSp>
+          <p:nvCxnSpPr>
+            <p:cNvPr id="16" name="Straight Arrow Connector 15">
+              <a:extLst>
+                <a:ext uri="{FF2B5EF4-FFF2-40B4-BE49-F238E27FC236}">
+                  <a16:creationId xmlns:a16="http://schemas.microsoft.com/office/drawing/2014/main" id="{027EA814-8575-33EC-768D-CFC1AF01766D}"/>
+                </a:ext>
+              </a:extLst>
+            </p:cNvPr>
+            <p:cNvCxnSpPr>
+              <a:cxnSpLocks/>
+              <a:stCxn id="5" idx="3"/>
+              <a:endCxn id="6" idx="7"/>
+            </p:cNvCxnSpPr>
+            <p:nvPr/>
+          </p:nvCxnSpPr>
+          <p:spPr>
+            <a:xfrm flipH="1">
+              <a:off x="3900535" y="1258046"/>
+              <a:ext cx="599505" cy="1715005"/>
+            </a:xfrm>
+            <a:prstGeom prst="straightConnector1">
+              <a:avLst/>
+            </a:prstGeom>
+            <a:ln>
+              <a:tailEnd type="triangle"/>
+            </a:ln>
+          </p:spPr>
+          <p:style>
+            <a:lnRef idx="2">
+              <a:schemeClr val="accent1"/>
+            </a:lnRef>
+            <a:fillRef idx="0">
+              <a:schemeClr val="accent1"/>
+            </a:fillRef>
+            <a:effectRef idx="1">
+              <a:schemeClr val="accent1"/>
+            </a:effectRef>
+            <a:fontRef idx="minor">
+              <a:schemeClr val="tx1"/>
+            </a:fontRef>
+          </p:style>
+        </p:cxnSp>
+        <p:cxnSp>
+          <p:nvCxnSpPr>
+            <p:cNvPr id="17" name="Straight Arrow Connector 16">
+              <a:extLst>
+                <a:ext uri="{FF2B5EF4-FFF2-40B4-BE49-F238E27FC236}">
+                  <a16:creationId xmlns:a16="http://schemas.microsoft.com/office/drawing/2014/main" id="{A026C631-B551-5DD5-3C68-ADEA33A7BA05}"/>
+                </a:ext>
+              </a:extLst>
+            </p:cNvPr>
+            <p:cNvCxnSpPr>
+              <a:cxnSpLocks/>
+              <a:stCxn id="4" idx="3"/>
+              <a:endCxn id="7" idx="0"/>
+            </p:cNvCxnSpPr>
+            <p:nvPr/>
+          </p:nvCxnSpPr>
+          <p:spPr>
+            <a:xfrm flipH="1">
+              <a:off x="1132818" y="1258046"/>
+              <a:ext cx="650949" cy="631714"/>
+            </a:xfrm>
+            <a:prstGeom prst="straightConnector1">
+              <a:avLst/>
+            </a:prstGeom>
+            <a:ln>
+              <a:tailEnd type="triangle"/>
+            </a:ln>
+          </p:spPr>
+          <p:style>
+            <a:lnRef idx="2">
+              <a:schemeClr val="accent1"/>
+            </a:lnRef>
+            <a:fillRef idx="0">
+              <a:schemeClr val="accent1"/>
+            </a:fillRef>
+            <a:effectRef idx="1">
+              <a:schemeClr val="accent1"/>
+            </a:effectRef>
+            <a:fontRef idx="minor">
+              <a:schemeClr val="tx1"/>
+            </a:fontRef>
+          </p:style>
+        </p:cxnSp>
+        <p:cxnSp>
+          <p:nvCxnSpPr>
+            <p:cNvPr id="20" name="Straight Arrow Connector 19">
+              <a:extLst>
+                <a:ext uri="{FF2B5EF4-FFF2-40B4-BE49-F238E27FC236}">
+                  <a16:creationId xmlns:a16="http://schemas.microsoft.com/office/drawing/2014/main" id="{380804EB-BE07-F099-ED19-2F32D8DC2D30}"/>
+                </a:ext>
+              </a:extLst>
+            </p:cNvPr>
+            <p:cNvCxnSpPr>
+              <a:cxnSpLocks/>
+              <a:stCxn id="5" idx="5"/>
+              <a:endCxn id="8" idx="0"/>
+            </p:cNvCxnSpPr>
+            <p:nvPr/>
+          </p:nvCxnSpPr>
+          <p:spPr>
+            <a:xfrm>
+              <a:off x="5209853" y="1258046"/>
+              <a:ext cx="500966" cy="631714"/>
+            </a:xfrm>
+            <a:prstGeom prst="straightConnector1">
+              <a:avLst/>
+            </a:prstGeom>
+            <a:ln>
+              <a:tailEnd type="triangle"/>
+            </a:ln>
+          </p:spPr>
+          <p:style>
+            <a:lnRef idx="2">
+              <a:schemeClr val="accent1"/>
+            </a:lnRef>
+            <a:fillRef idx="0">
+              <a:schemeClr val="accent1"/>
+            </a:fillRef>
+            <a:effectRef idx="1">
+              <a:schemeClr val="accent1"/>
+            </a:effectRef>
+            <a:fontRef idx="minor">
+              <a:schemeClr val="tx1"/>
+            </a:fontRef>
+          </p:style>
+        </p:cxnSp>
+        <p:cxnSp>
+          <p:nvCxnSpPr>
+            <p:cNvPr id="29" name="Straight Arrow Connector 28">
+              <a:extLst>
+                <a:ext uri="{FF2B5EF4-FFF2-40B4-BE49-F238E27FC236}">
+                  <a16:creationId xmlns:a16="http://schemas.microsoft.com/office/drawing/2014/main" id="{0185773B-D9BB-1454-2622-5F1AF7D4E1E9}"/>
+                </a:ext>
+              </a:extLst>
+            </p:cNvPr>
+            <p:cNvCxnSpPr>
+              <a:cxnSpLocks/>
+              <a:stCxn id="6" idx="4"/>
+              <a:endCxn id="9" idx="0"/>
+            </p:cNvCxnSpPr>
+            <p:nvPr/>
+          </p:nvCxnSpPr>
+          <p:spPr>
+            <a:xfrm flipH="1">
+              <a:off x="3494907" y="3471826"/>
+              <a:ext cx="1" cy="473432"/>
+            </a:xfrm>
+            <a:prstGeom prst="straightConnector1">
+              <a:avLst/>
+            </a:prstGeom>
+            <a:ln>
+              <a:tailEnd type="triangle"/>
+            </a:ln>
+          </p:spPr>
+          <p:style>
+            <a:lnRef idx="2">
+              <a:schemeClr val="accent1"/>
+            </a:lnRef>
+            <a:fillRef idx="0">
+              <a:schemeClr val="accent1"/>
+            </a:fillRef>
+            <a:effectRef idx="1">
+              <a:schemeClr val="accent1"/>
+            </a:effectRef>
+            <a:fontRef idx="minor">
+              <a:schemeClr val="tx1"/>
+            </a:fontRef>
+          </p:style>
+        </p:cxnSp>
+        <p:cxnSp>
+          <p:nvCxnSpPr>
+            <p:cNvPr id="32" name="Straight Arrow Connector 31">
+              <a:extLst>
+                <a:ext uri="{FF2B5EF4-FFF2-40B4-BE49-F238E27FC236}">
+                  <a16:creationId xmlns:a16="http://schemas.microsoft.com/office/drawing/2014/main" id="{D28FAE91-B91D-CEF0-E4CA-994F9E3E37B0}"/>
+                </a:ext>
+              </a:extLst>
+            </p:cNvPr>
+            <p:cNvCxnSpPr>
+              <a:cxnSpLocks/>
+              <a:stCxn id="9" idx="2"/>
+              <a:endCxn id="10" idx="0"/>
+            </p:cNvCxnSpPr>
+            <p:nvPr/>
+          </p:nvCxnSpPr>
+          <p:spPr>
+            <a:xfrm>
+              <a:off x="3494907" y="4485326"/>
+              <a:ext cx="0" cy="564534"/>
+            </a:xfrm>
+            <a:prstGeom prst="straightConnector1">
+              <a:avLst/>
+            </a:prstGeom>
+            <a:ln>
+              <a:tailEnd type="triangle"/>
+            </a:ln>
+          </p:spPr>
+          <p:style>
+            <a:lnRef idx="2">
+              <a:schemeClr val="accent1"/>
+            </a:lnRef>
+            <a:fillRef idx="0">
+              <a:schemeClr val="accent1"/>
+            </a:fillRef>
+            <a:effectRef idx="1">
+              <a:schemeClr val="accent1"/>
+            </a:effectRef>
+            <a:fontRef idx="minor">
+              <a:schemeClr val="tx1"/>
+            </a:fontRef>
+          </p:style>
+        </p:cxnSp>
+        <p:cxnSp>
+          <p:nvCxnSpPr>
+            <p:cNvPr id="40" name="Straight Connector 39">
+              <a:extLst>
+                <a:ext uri="{FF2B5EF4-FFF2-40B4-BE49-F238E27FC236}">
+                  <a16:creationId xmlns:a16="http://schemas.microsoft.com/office/drawing/2014/main" id="{B4A967A9-D58D-4D32-A3D0-17EA9B7CEA9D}"/>
+                </a:ext>
+              </a:extLst>
+            </p:cNvPr>
+            <p:cNvCxnSpPr>
+              <a:cxnSpLocks/>
+              <a:stCxn id="7" idx="2"/>
+            </p:cNvCxnSpPr>
+            <p:nvPr/>
+          </p:nvCxnSpPr>
+          <p:spPr>
+            <a:xfrm>
+              <a:off x="1132818" y="2302220"/>
+              <a:ext cx="0" cy="2639350"/>
+            </a:xfrm>
+            <a:prstGeom prst="line">
+              <a:avLst/>
+            </a:prstGeom>
+          </p:spPr>
+          <p:style>
+            <a:lnRef idx="2">
+              <a:schemeClr val="accent1"/>
+            </a:lnRef>
+            <a:fillRef idx="0">
+              <a:schemeClr val="accent1"/>
+            </a:fillRef>
+            <a:effectRef idx="1">
+              <a:schemeClr val="accent1"/>
+            </a:effectRef>
+            <a:fontRef idx="minor">
+              <a:schemeClr val="tx1"/>
+            </a:fontRef>
+          </p:style>
+        </p:cxnSp>
+        <p:cxnSp>
+          <p:nvCxnSpPr>
+            <p:cNvPr id="43" name="Straight Connector 42">
+              <a:extLst>
+                <a:ext uri="{FF2B5EF4-FFF2-40B4-BE49-F238E27FC236}">
+                  <a16:creationId xmlns:a16="http://schemas.microsoft.com/office/drawing/2014/main" id="{AC3BCC0D-3705-4EB9-1893-B974CE49DD40}"/>
+                </a:ext>
+              </a:extLst>
+            </p:cNvPr>
+            <p:cNvCxnSpPr>
+              <a:cxnSpLocks/>
+              <a:stCxn id="8" idx="2"/>
+            </p:cNvCxnSpPr>
+            <p:nvPr/>
+          </p:nvCxnSpPr>
+          <p:spPr>
+            <a:xfrm>
+              <a:off x="5710819" y="2302220"/>
+              <a:ext cx="14362" cy="2639350"/>
+            </a:xfrm>
+            <a:prstGeom prst="line">
+              <a:avLst/>
+            </a:prstGeom>
+          </p:spPr>
+          <p:style>
+            <a:lnRef idx="2">
+              <a:schemeClr val="accent1"/>
+            </a:lnRef>
+            <a:fillRef idx="0">
+              <a:schemeClr val="accent1"/>
+            </a:fillRef>
+            <a:effectRef idx="1">
+              <a:schemeClr val="accent1"/>
+            </a:effectRef>
+            <a:fontRef idx="minor">
+              <a:schemeClr val="tx1"/>
+            </a:fontRef>
+          </p:style>
+        </p:cxnSp>
+        <p:cxnSp>
+          <p:nvCxnSpPr>
+            <p:cNvPr id="47" name="Straight Connector 46">
+              <a:extLst>
+                <a:ext uri="{FF2B5EF4-FFF2-40B4-BE49-F238E27FC236}">
+                  <a16:creationId xmlns:a16="http://schemas.microsoft.com/office/drawing/2014/main" id="{72617FF4-B38E-4A3C-AEC9-5BEB9E93CE43}"/>
+                </a:ext>
+              </a:extLst>
+            </p:cNvPr>
+            <p:cNvCxnSpPr>
+              <a:cxnSpLocks/>
+            </p:cNvCxnSpPr>
+            <p:nvPr/>
+          </p:nvCxnSpPr>
+          <p:spPr>
+            <a:xfrm flipH="1">
+              <a:off x="1132818" y="4941570"/>
+              <a:ext cx="4592364" cy="0"/>
+            </a:xfrm>
+            <a:prstGeom prst="line">
+              <a:avLst/>
+            </a:prstGeom>
+          </p:spPr>
+          <p:style>
+            <a:lnRef idx="2">
+              <a:schemeClr val="accent1"/>
+            </a:lnRef>
+            <a:fillRef idx="0">
+              <a:schemeClr val="accent1"/>
+            </a:fillRef>
+            <a:effectRef idx="1">
+              <a:schemeClr val="accent1"/>
+            </a:effectRef>
+            <a:fontRef idx="minor">
+              <a:schemeClr val="tx1"/>
+            </a:fontRef>
+          </p:style>
+        </p:cxnSp>
+        <p:sp>
+          <p:nvSpPr>
+            <p:cNvPr id="68" name="Oval 67">
+              <a:extLst>
+                <a:ext uri="{FF2B5EF4-FFF2-40B4-BE49-F238E27FC236}">
+                  <a16:creationId xmlns:a16="http://schemas.microsoft.com/office/drawing/2014/main" id="{7726A30C-CA6A-BF71-5F1C-ED852E98388A}"/>
+                </a:ext>
+              </a:extLst>
+            </p:cNvPr>
+            <p:cNvSpPr/>
+            <p:nvPr/>
+          </p:nvSpPr>
+          <p:spPr>
+            <a:xfrm>
+              <a:off x="453628" y="939657"/>
+              <a:ext cx="216000" cy="216000"/>
+            </a:xfrm>
+            <a:prstGeom prst="ellipse">
+              <a:avLst/>
+            </a:prstGeom>
+            <a:noFill/>
+          </p:spPr>
+          <p:style>
+            <a:lnRef idx="0">
+              <a:schemeClr val="dk1"/>
+            </a:lnRef>
+            <a:fillRef idx="3">
+              <a:schemeClr val="dk1"/>
+            </a:fillRef>
+            <a:effectRef idx="3">
+              <a:schemeClr val="dk1"/>
+            </a:effectRef>
+            <a:fontRef idx="minor">
+              <a:schemeClr val="lt1"/>
+            </a:fontRef>
+          </p:style>
+          <p:txBody>
+            <a:bodyPr rtlCol="0" anchor="ctr"/>
+            <a:lstStyle/>
+            <a:p>
+              <a:pPr algn="ctr"/>
+              <a:r>
+                <a:rPr lang="en-GB" dirty="0"/>
+                <a:t>1</a:t>
+              </a:r>
+            </a:p>
+          </p:txBody>
+        </p:sp>
+        <p:sp>
+          <p:nvSpPr>
+            <p:cNvPr id="69" name="Oval 68">
+              <a:extLst>
+                <a:ext uri="{FF2B5EF4-FFF2-40B4-BE49-F238E27FC236}">
+                  <a16:creationId xmlns:a16="http://schemas.microsoft.com/office/drawing/2014/main" id="{139E1A0D-9746-608B-CC0F-1271227A9A14}"/>
+                </a:ext>
+              </a:extLst>
+            </p:cNvPr>
+            <p:cNvSpPr/>
+            <p:nvPr/>
+          </p:nvSpPr>
+          <p:spPr>
+            <a:xfrm>
+              <a:off x="453628" y="1967989"/>
+              <a:ext cx="216000" cy="216000"/>
+            </a:xfrm>
+            <a:prstGeom prst="ellipse">
+              <a:avLst/>
+            </a:prstGeom>
+            <a:noFill/>
+          </p:spPr>
+          <p:style>
+            <a:lnRef idx="0">
+              <a:schemeClr val="dk1"/>
+            </a:lnRef>
+            <a:fillRef idx="3">
+              <a:schemeClr val="dk1"/>
+            </a:fillRef>
+            <a:effectRef idx="3">
+              <a:schemeClr val="dk1"/>
+            </a:effectRef>
+            <a:fontRef idx="minor">
+              <a:schemeClr val="lt1"/>
+            </a:fontRef>
+          </p:style>
+          <p:txBody>
+            <a:bodyPr rtlCol="0" anchor="ctr"/>
+            <a:lstStyle/>
+            <a:p>
+              <a:pPr algn="ctr"/>
+              <a:r>
+                <a:rPr lang="en-GB" dirty="0"/>
+                <a:t>2</a:t>
+              </a:r>
+            </a:p>
+          </p:txBody>
+        </p:sp>
+        <p:sp>
+          <p:nvSpPr>
+            <p:cNvPr id="70" name="Oval 69">
+              <a:extLst>
+                <a:ext uri="{FF2B5EF4-FFF2-40B4-BE49-F238E27FC236}">
+                  <a16:creationId xmlns:a16="http://schemas.microsoft.com/office/drawing/2014/main" id="{97C406ED-3697-2870-510C-1FC6B2868708}"/>
+                </a:ext>
+              </a:extLst>
+            </p:cNvPr>
+            <p:cNvSpPr/>
+            <p:nvPr/>
+          </p:nvSpPr>
+          <p:spPr>
+            <a:xfrm>
+              <a:off x="453628" y="3025339"/>
+              <a:ext cx="216000" cy="216000"/>
+            </a:xfrm>
+            <a:prstGeom prst="ellipse">
+              <a:avLst/>
+            </a:prstGeom>
+            <a:noFill/>
+          </p:spPr>
+          <p:style>
+            <a:lnRef idx="0">
+              <a:schemeClr val="dk1"/>
+            </a:lnRef>
+            <a:fillRef idx="3">
+              <a:schemeClr val="dk1"/>
+            </a:fillRef>
+            <a:effectRef idx="3">
+              <a:schemeClr val="dk1"/>
+            </a:effectRef>
+            <a:fontRef idx="minor">
+              <a:schemeClr val="lt1"/>
+            </a:fontRef>
+          </p:style>
+          <p:txBody>
+            <a:bodyPr rtlCol="0" anchor="ctr"/>
+            <a:lstStyle/>
+            <a:p>
+              <a:pPr algn="ctr"/>
+              <a:r>
+                <a:rPr lang="en-GB" dirty="0"/>
+                <a:t>3</a:t>
+              </a:r>
+            </a:p>
+          </p:txBody>
+        </p:sp>
+        <p:sp>
+          <p:nvSpPr>
+            <p:cNvPr id="71" name="Oval 70">
+              <a:extLst>
+                <a:ext uri="{FF2B5EF4-FFF2-40B4-BE49-F238E27FC236}">
+                  <a16:creationId xmlns:a16="http://schemas.microsoft.com/office/drawing/2014/main" id="{84674672-65FD-69CF-33AB-64BE843C792B}"/>
+                </a:ext>
+              </a:extLst>
+            </p:cNvPr>
+            <p:cNvSpPr/>
+            <p:nvPr/>
+          </p:nvSpPr>
+          <p:spPr>
+            <a:xfrm>
+              <a:off x="443917" y="4083550"/>
+              <a:ext cx="216000" cy="216000"/>
+            </a:xfrm>
+            <a:prstGeom prst="ellipse">
+              <a:avLst/>
+            </a:prstGeom>
+            <a:noFill/>
+          </p:spPr>
+          <p:style>
+            <a:lnRef idx="0">
+              <a:schemeClr val="dk1"/>
+            </a:lnRef>
+            <a:fillRef idx="3">
+              <a:schemeClr val="dk1"/>
+            </a:fillRef>
+            <a:effectRef idx="3">
+              <a:schemeClr val="dk1"/>
+            </a:effectRef>
+            <a:fontRef idx="minor">
+              <a:schemeClr val="lt1"/>
+            </a:fontRef>
+          </p:style>
+          <p:txBody>
+            <a:bodyPr rtlCol="0" anchor="ctr"/>
+            <a:lstStyle/>
+            <a:p>
+              <a:pPr algn="ctr"/>
+              <a:r>
+                <a:rPr lang="en-GB" dirty="0"/>
+                <a:t>4</a:t>
+              </a:r>
+            </a:p>
+          </p:txBody>
+        </p:sp>
+        <p:sp>
+          <p:nvSpPr>
+            <p:cNvPr id="76" name="Oval 75">
+              <a:extLst>
+                <a:ext uri="{FF2B5EF4-FFF2-40B4-BE49-F238E27FC236}">
+                  <a16:creationId xmlns:a16="http://schemas.microsoft.com/office/drawing/2014/main" id="{A19393A6-65E2-DE7F-DD2A-BD6B1741520D}"/>
+                </a:ext>
+              </a:extLst>
+            </p:cNvPr>
+            <p:cNvSpPr/>
+            <p:nvPr/>
+          </p:nvSpPr>
+          <p:spPr>
+            <a:xfrm>
+              <a:off x="458827" y="5147936"/>
+              <a:ext cx="216000" cy="216000"/>
+            </a:xfrm>
+            <a:prstGeom prst="ellipse">
+              <a:avLst/>
+            </a:prstGeom>
+            <a:noFill/>
+          </p:spPr>
+          <p:style>
+            <a:lnRef idx="0">
+              <a:schemeClr val="dk1"/>
+            </a:lnRef>
+            <a:fillRef idx="3">
+              <a:schemeClr val="dk1"/>
+            </a:fillRef>
+            <a:effectRef idx="3">
+              <a:schemeClr val="dk1"/>
+            </a:effectRef>
+            <a:fontRef idx="minor">
+              <a:schemeClr val="lt1"/>
+            </a:fontRef>
+          </p:style>
+          <p:txBody>
+            <a:bodyPr rtlCol="0" anchor="ctr"/>
+            <a:lstStyle/>
+            <a:p>
+              <a:pPr algn="ctr"/>
+              <a:r>
+                <a:rPr lang="en-GB" dirty="0"/>
+                <a:t>5</a:t>
+              </a:r>
+            </a:p>
+          </p:txBody>
+        </p:sp>
+      </p:grpSp>
     </p:spTree>
     <p:extLst>
       <p:ext uri="{BB962C8B-B14F-4D97-AF65-F5344CB8AC3E}">
